--- a/docs/course/AHRI-VA-Example.pptx
+++ b/docs/course/AHRI-VA-Example.pptx
@@ -115,6 +115,11 @@
       </a:defRPr>
     </a:lvl9pPr>
   </p:defaultTextStyle>
+  <p:extLst>
+    <p:ext uri="{EFAFB233-063F-42B5-8137-9DF3F51BA10A}">
+      <p15:sldGuideLst xmlns:p15="http://schemas.microsoft.com/office/powerpoint/2012/main"/>
+    </p:ext>
+  </p:extLst>
 </p:presentation>
 </file>
 

--- a/docs/course/AHRI-VA-Example.pptx
+++ b/docs/course/AHRI-VA-Example.pptx
@@ -6974,11 +6974,17 @@
         <p:nvGraphicFramePr>
           <p:cNvPr id="14" name="Table 13"/>
           <p:cNvGraphicFramePr/>
-          <p:nvPr/>
+          <p:nvPr>
+            <p:extLst>
+              <p:ext uri="{D42A27DB-BD31-4B8C-83A1-F6EECF244321}">
+                <p14:modId xmlns:p14="http://schemas.microsoft.com/office/powerpoint/2010/main" val="1230267101"/>
+              </p:ext>
+            </p:extLst>
+          </p:nvPr>
         </p:nvGraphicFramePr>
         <p:xfrm>
           <a:off x="685800" y="2085975"/>
-          <a:ext cx="10820400" cy="3333750"/>
+          <a:ext cx="10820400" cy="2667000"/>
         </p:xfrm>
         <a:graphic>
           <a:graphicData uri="http://schemas.openxmlformats.org/drawingml/2006/table">
@@ -7062,7 +7068,7 @@
                     <a:lstStyle/>
                     <a:p>
                       <a:r>
-                        <a:rPr sz="1950" b="0">
+                        <a:rPr sz="1950" b="0" dirty="0">
                           <a:solidFill>
                             <a:srgbClr val="000000"/>
                           </a:solidFill>
@@ -7070,7 +7076,29 @@
                           <a:ea typeface="Avenir Next"/>
                           <a:cs typeface="Avenir Next"/>
                         </a:rPr>
-                        <a:t>00–20 min</a:t>
+                        <a:t>00–</a:t>
+                      </a:r>
+                      <a:r>
+                        <a:rPr lang="en-ZA" sz="1950" b="0" dirty="0">
+                          <a:solidFill>
+                            <a:srgbClr val="000000"/>
+                          </a:solidFill>
+                          <a:latin typeface="Avenir Next"/>
+                          <a:ea typeface="Avenir Next"/>
+                          <a:cs typeface="Avenir Next"/>
+                        </a:rPr>
+                        <a:t>2</a:t>
+                      </a:r>
+                      <a:r>
+                        <a:rPr sz="1950" b="0" dirty="0">
+                          <a:solidFill>
+                            <a:srgbClr val="000000"/>
+                          </a:solidFill>
+                          <a:latin typeface="Avenir Next"/>
+                          <a:ea typeface="Avenir Next"/>
+                          <a:cs typeface="Avenir Next"/>
+                        </a:rPr>
+                        <a:t>0 min</a:t>
                       </a:r>
                     </a:p>
                   </a:txBody>
@@ -7086,7 +7114,7 @@
                     <a:lstStyle/>
                     <a:p>
                       <a:r>
-                        <a:rPr sz="1950" b="0">
+                        <a:rPr lang="en-ZA" sz="1950" b="0" dirty="0">
                           <a:solidFill>
                             <a:srgbClr val="000000"/>
                           </a:solidFill>
@@ -7096,6 +7124,14 @@
                         </a:rPr>
                         <a:t>Essential concepts</a:t>
                       </a:r>
+                      <a:endParaRPr sz="1950" b="0" dirty="0">
+                        <a:solidFill>
+                          <a:srgbClr val="000000"/>
+                        </a:solidFill>
+                        <a:latin typeface="Avenir Next"/>
+                        <a:ea typeface="Avenir Next"/>
+                        <a:cs typeface="Avenir Next"/>
+                      </a:endParaRPr>
                     </a:p>
                   </a:txBody>
                   <a:tcPr>
@@ -7117,7 +7153,7 @@
                     <a:lstStyle/>
                     <a:p>
                       <a:r>
-                        <a:rPr sz="1950" b="0">
+                        <a:rPr sz="1950" b="0" dirty="0">
                           <a:solidFill>
                             <a:srgbClr val="000000"/>
                           </a:solidFill>
@@ -7125,7 +7161,29 @@
                           <a:ea typeface="Avenir Next"/>
                           <a:cs typeface="Avenir Next"/>
                         </a:rPr>
-                        <a:t>20–85 min</a:t>
+                        <a:t>20–</a:t>
+                      </a:r>
+                      <a:r>
+                        <a:rPr lang="en-US" sz="1950" b="0" dirty="0">
+                          <a:solidFill>
+                            <a:srgbClr val="000000"/>
+                          </a:solidFill>
+                          <a:latin typeface="Avenir Next"/>
+                          <a:ea typeface="Avenir Next"/>
+                          <a:cs typeface="Avenir Next"/>
+                        </a:rPr>
+                        <a:t>100</a:t>
+                      </a:r>
+                      <a:r>
+                        <a:rPr sz="1950" b="0" dirty="0">
+                          <a:solidFill>
+                            <a:srgbClr val="000000"/>
+                          </a:solidFill>
+                          <a:latin typeface="Avenir Next"/>
+                          <a:ea typeface="Avenir Next"/>
+                          <a:cs typeface="Avenir Next"/>
+                        </a:rPr>
+                        <a:t> min</a:t>
                       </a:r>
                     </a:p>
                   </a:txBody>
@@ -7180,61 +7238,6 @@
                           <a:ea typeface="Avenir Next"/>
                           <a:cs typeface="Avenir Next"/>
                         </a:rPr>
-                        <a:t>85–100 min</a:t>
-                      </a:r>
-                    </a:p>
-                  </a:txBody>
-                  <a:tcPr>
-                    <a:solidFill>
-                      <a:srgbClr val="FFFFFF"/>
-                    </a:solidFill>
-                  </a:tcPr>
-                </a:tc>
-                <a:tc>
-                  <a:txBody>
-                    <a:bodyPr/>
-                    <a:lstStyle/>
-                    <a:p>
-                      <a:r>
-                        <a:rPr sz="1950" b="0">
-                          <a:solidFill>
-                            <a:srgbClr val="000000"/>
-                          </a:solidFill>
-                          <a:latin typeface="Avenir Next"/>
-                          <a:ea typeface="Avenir Next"/>
-                          <a:cs typeface="Avenir Next"/>
-                        </a:rPr>
-                        <a:t>Results and limitations</a:t>
-                      </a:r>
-                    </a:p>
-                  </a:txBody>
-                  <a:tcPr>
-                    <a:solidFill>
-                      <a:srgbClr val="FFFFFF"/>
-                    </a:solidFill>
-                  </a:tcPr>
-                </a:tc>
-                <a:extLst>
-                  <a:ext uri="{0D108BD9-81ED-4DB2-BD59-A6C34878D82A}">
-                    <a16:rowId xmlns:a16="http://schemas.microsoft.com/office/drawing/2014/main" val="10003"/>
-                  </a:ext>
-                </a:extLst>
-              </a:tr>
-              <a:tr h="666750">
-                <a:tc>
-                  <a:txBody>
-                    <a:bodyPr/>
-                    <a:lstStyle/>
-                    <a:p>
-                      <a:r>
-                        <a:rPr sz="1950" b="0">
-                          <a:solidFill>
-                            <a:srgbClr val="000000"/>
-                          </a:solidFill>
-                          <a:latin typeface="Avenir Next"/>
-                          <a:ea typeface="Avenir Next"/>
-                          <a:cs typeface="Avenir Next"/>
-                        </a:rPr>
                         <a:t>100–120 min</a:t>
                       </a:r>
                     </a:p>
@@ -7251,7 +7254,7 @@
                     <a:lstStyle/>
                     <a:p>
                       <a:r>
-                        <a:rPr sz="1950" b="0">
+                        <a:rPr sz="1950" b="0" dirty="0">
                           <a:solidFill>
                             <a:srgbClr val="000000"/>
                           </a:solidFill>
